--- a/docs/zaroprojekt-prezentacio.pptx
+++ b/docs/zaroprojekt-prezentacio.pptx
@@ -1612,7 +1612,7 @@
                 <a:ea typeface="Calibri" pitchFamily="34" charset="-122"/>
                 <a:cs typeface="Calibri" pitchFamily="34" charset="-120"/>
               </a:rPr>
-              <a:t>24/7 forrásmegjelölt válasz az ügyfelek elektronikus aláírás kérdéseire — bizonytalanság esetén emberhez irányítva.</a:t>
+              <a:t>24/7 forrásmegjelölt választ adok az ügyfelek elektronikus aláírás kérdéseire — bizonytalanság esetén emberhez irányítva.</a:t>
             </a:r>
             <a:endParaRPr lang="en-US" sz="2000" dirty="0"/>
           </a:p>
@@ -1970,7 +1970,7 @@
                 <a:ea typeface="Cambria" pitchFamily="34" charset="-122"/>
                 <a:cs typeface="Cambria" pitchFamily="34" charset="-120"/>
               </a:rPr>
-              <a:t>Ma  →  asszisztenssel</a:t>
+              <a:t>Ma  →  az asszisztensemmel</a:t>
             </a:r>
             <a:endParaRPr lang="en-US" sz="3000" dirty="0"/>
           </a:p>
@@ -2671,7 +2671,7 @@
                 <a:ea typeface="Calibri" pitchFamily="34" charset="-122"/>
                 <a:cs typeface="Calibri" pitchFamily="34" charset="-120"/>
               </a:rPr>
-              <a:t>Megoldja:  </a:t>
+              <a:t>Megoldom:  </a:t>
             </a:r>
             <a:pPr algn="l" indent="0" marL="0">
               <a:buNone/>
@@ -2783,7 +2783,7 @@
                 <a:ea typeface="Calibri" pitchFamily="34" charset="-122"/>
                 <a:cs typeface="Calibri" pitchFamily="34" charset="-120"/>
               </a:rPr>
-              <a:t>Nem oldja meg:  </a:t>
+              <a:t>Nem oldom meg:  </a:t>
             </a:r>
             <a:pPr algn="l" indent="0" marL="0">
               <a:buNone/>
@@ -2836,7 +2836,7 @@
                 <a:ea typeface="Calibri" pitchFamily="34" charset="-122"/>
                 <a:cs typeface="Calibri" pitchFamily="34" charset="-120"/>
               </a:rPr>
-              <a:t>Ezekhez ügyfél-, tranzakció- vagy viselkedési adat kellene, ami a PoC hatókörén kívül esik — és ezt kimondjuk.</a:t>
+              <a:t>Ezekhez ügyfél-, tranzakció- vagy viselkedési adat kellene, ami a PoC hatókörén kívül esik — és ezt kimondom.</a:t>
             </a:r>
             <a:endParaRPr lang="en-US" sz="1250" dirty="0"/>
           </a:p>
@@ -2949,7 +2949,7 @@
                 <a:ea typeface="Calibri" pitchFamily="34" charset="-122"/>
                 <a:cs typeface="Calibri" pitchFamily="34" charset="-120"/>
               </a:rPr>
-              <a:t>Az ügyfél kérdez a /support oldalon. A rendszer a 20 ETSI szabványból épült tudásbázisában keres, és csak abból válaszol — minden állítás mellé odateszi a konkrét klauzulát. Ha nincs elég erős alapja, nem találgat: emberhez irányít.</a:t>
+              <a:t>Az ügyfél kérdez a /support oldalon. A rendszerem a 20 ETSI szabványból épült tudásbázisában keres, és csak abból válaszol — minden állítás mellé odateszi a konkrét klauzulát. Ha nincs elég erős alapja, nem találgat: emberhez irányít.</a:t>
             </a:r>
             <a:endParaRPr lang="en-US" sz="1550" dirty="0"/>
           </a:p>
@@ -3662,7 +3662,7 @@
                 <a:ea typeface="Calibri" pitchFamily="34" charset="-122"/>
                 <a:cs typeface="Calibri" pitchFamily="34" charset="-120"/>
               </a:rPr>
-              <a:t>NÁLUNK</a:t>
+              <a:t>NÁLAM</a:t>
             </a:r>
             <a:endParaRPr lang="en-US" sz="1250" dirty="0"/>
           </a:p>
@@ -3825,7 +3825,7 @@
                 <a:ea typeface="Calibri" pitchFamily="34" charset="-122"/>
                 <a:cs typeface="Calibri" pitchFamily="34" charset="-120"/>
               </a:rPr>
-              <a:t>NÁLUNK</a:t>
+              <a:t>NÁLAM</a:t>
             </a:r>
             <a:endParaRPr lang="en-US" sz="1250" dirty="0"/>
           </a:p>
@@ -4151,7 +4151,7 @@
                 <a:ea typeface="Calibri" pitchFamily="34" charset="-122"/>
                 <a:cs typeface="Calibri" pitchFamily="34" charset="-120"/>
               </a:rPr>
-              <a:t>NÁLUNK</a:t>
+              <a:t>NÁLAM</a:t>
             </a:r>
             <a:endParaRPr lang="en-US" sz="1250" dirty="0"/>
           </a:p>
@@ -4239,7 +4239,7 @@
                 <a:ea typeface="Calibri" pitchFamily="34" charset="-122"/>
                 <a:cs typeface="Calibri" pitchFamily="34" charset="-120"/>
               </a:rPr>
-              <a:t>a kérdés szövege az USA-beli szolgáltatókhoz jut. A tudásbázis nyilvános ETSI szöveg; az ügyfél személyes azonosítóit nem küldjük ki.</a:t>
+              <a:t>a kérdés szövege az USA-beli szolgáltatókhoz jut. A tudásbázis nyilvános ETSI szöveg; az ügyfél személyes azonosítóit nem küldöm ki.</a:t>
             </a:r>
             <a:endParaRPr lang="en-US" sz="1450" dirty="0"/>
           </a:p>
@@ -6191,7 +6191,7 @@
                 <a:ea typeface="Calibri" pitchFamily="34" charset="-122"/>
                 <a:cs typeface="Calibri" pitchFamily="34" charset="-120"/>
               </a:rPr>
-              <a:t>A döntést nem most kérjük véglegesen — a 4. héten, valós számok alapján hozzuk meg.</a:t>
+              <a:t>A döntést nem most kérem véglegesen — a 4. héten, valós számok alapján hozzuk meg.</a:t>
             </a:r>
             <a:endParaRPr lang="en-US" sz="1250" dirty="0"/>
           </a:p>
@@ -6672,7 +6672,7 @@
                 <a:ea typeface="Calibri" pitchFamily="34" charset="-122"/>
                 <a:cs typeface="Calibri" pitchFamily="34" charset="-120"/>
               </a:rPr>
-              <a:t>Hol téved vagy hol nem elég az asszisztens?</a:t>
+              <a:t>Hol téved vagy hol nem elég az asszisztensem?</a:t>
             </a:r>
             <a:endParaRPr lang="en-US" sz="1350" dirty="0"/>
           </a:p>
@@ -6838,7 +6838,7 @@
                 <a:ea typeface="Calibri" pitchFamily="34" charset="-122"/>
                 <a:cs typeface="Calibri" pitchFamily="34" charset="-120"/>
               </a:rPr>
-              <a:t>a magas eszkaláció önmagában nem rossz hír — azt jelenti, hogy a rendszer felismerte a korlátját. A téves válasz mindig rossz hír.</a:t>
+              <a:t>a magas eszkaláció önmagában nem rossz hír — azt jelenti, hogy a rendszerem felismerte a korlátját. A téves válasz mindig rossz hír.</a:t>
             </a:r>
             <a:endParaRPr lang="en-US" sz="1450" dirty="0"/>
           </a:p>
@@ -6948,7 +6948,7 @@
                 <a:ea typeface="Cambria" pitchFamily="34" charset="-122"/>
                 <a:cs typeface="Cambria" pitchFamily="34" charset="-120"/>
               </a:rPr>
-              <a:t>Mit kérünk</a:t>
+              <a:t>Mit kérek</a:t>
             </a:r>
             <a:endParaRPr lang="en-US" sz="3000" dirty="0"/>
           </a:p>
@@ -7212,7 +7212,7 @@
                 <a:ea typeface="Calibri" pitchFamily="34" charset="-122"/>
                 <a:cs typeface="Calibri" pitchFamily="34" charset="-120"/>
               </a:rPr>
-              <a:t>Emberi kapu — bizonytalanságnál a rendszer eszkalál, nem találgat (beépítve, demózva).</a:t>
+              <a:t>Emberi kapu — bizonytalanságnál a rendszerem eszkalál, nem találgatok (beépítve, demózva).</a:t>
             </a:r>
             <a:endParaRPr lang="en-US" sz="1350" dirty="0"/>
           </a:p>
@@ -7336,7 +7336,7 @@
                 <a:ea typeface="Calibri" pitchFamily="34" charset="-122"/>
                 <a:cs typeface="Calibri" pitchFamily="34" charset="-120"/>
               </a:rPr>
-              <a:t>Rollback: a /support bejárat percek alatt kikapcsolható — az ügyfél a mai csatornára esik vissza, adatvesztés nincs, a belső eszköz érintetlen.</a:t>
+              <a:t>Rollback: a /support bejáratot percek alatt kikapcsolom — az ügyfél a mai csatornára esik vissza, adatvesztés nincs, a belső eszköz érintetlen.</a:t>
             </a:r>
             <a:endParaRPr lang="en-US" sz="1350" dirty="0"/>
           </a:p>
@@ -7398,7 +7398,7 @@
                 <a:ea typeface="Calibri" pitchFamily="34" charset="-122"/>
                 <a:cs typeface="Calibri" pitchFamily="34" charset="-120"/>
               </a:rPr>
-              <a:t>A fő kockázat — a kérdés szövege külföldre kerül — a mérséklésekkel kezelt; a PII-szűrőről és a ZDR-szerződésről külön döntést kérünk.</a:t>
+              <a:t>A fő kockázat — a kérdés szövege külföldre kerül — a mérséklésekkel kezelt; a PII-szűrőről és a ZDR-szerződésről külön döntést kérek.</a:t>
             </a:r>
             <a:endParaRPr lang="en-US" sz="1350" dirty="0"/>
           </a:p>
